--- a/ppt/IoT21-MicropythonSerial.pptx
+++ b/ppt/IoT21-MicropythonSerial.pptx
@@ -22,15 +22,15 @@
     <p:sldId id="304" r:id="rId10"/>
     <p:sldId id="269" r:id="rId11"/>
     <p:sldId id="302" r:id="rId12"/>
-    <p:sldId id="306" r:id="rId13"/>
-    <p:sldId id="300" r:id="rId14"/>
-    <p:sldId id="301" r:id="rId15"/>
-    <p:sldId id="272" r:id="rId16"/>
-    <p:sldId id="273" r:id="rId17"/>
-    <p:sldId id="276" r:id="rId18"/>
-    <p:sldId id="277" r:id="rId19"/>
-    <p:sldId id="274" r:id="rId20"/>
-    <p:sldId id="275" r:id="rId21"/>
+    <p:sldId id="300" r:id="rId13"/>
+    <p:sldId id="301" r:id="rId14"/>
+    <p:sldId id="272" r:id="rId15"/>
+    <p:sldId id="273" r:id="rId16"/>
+    <p:sldId id="276" r:id="rId17"/>
+    <p:sldId id="277" r:id="rId18"/>
+    <p:sldId id="274" r:id="rId19"/>
+    <p:sldId id="275" r:id="rId20"/>
+    <p:sldId id="306" r:id="rId21"/>
   </p:sldIdLst>
   <p:sldSz cx="9144000" cy="6858000" type="screen4x3"/>
   <p:notesSz cx="6648450" cy="9782175"/>
@@ -1006,7 +1006,7 @@
               <a:pPr>
                 <a:defRPr/>
               </a:pPr>
-              <a:t>19</a:t>
+              <a:t>18</a:t>
             </a:fld>
             <a:endParaRPr lang="fr-FR"/>
           </a:p>
@@ -4095,6 +4095,13 @@
           </a:p>
           <a:p>
             <a:pPr lvl="1"/>
+            <a:r>
+              <a:rPr lang="fr-FR" dirty="0"/>
+              <a:t>Pas de liaison 3.3v ni 5v</a:t>
+            </a:r>
+          </a:p>
+          <a:p>
+            <a:pPr lvl="1"/>
             <a:endParaRPr lang="fr-FR" dirty="0"/>
           </a:p>
         </p:txBody>
@@ -4134,198 +4141,6 @@
           <p:cNvPr id="2" name="Titre 1">
             <a:extLst>
               <a:ext uri="{FF2B5EF4-FFF2-40B4-BE49-F238E27FC236}">
-                <a16:creationId xmlns:a16="http://schemas.microsoft.com/office/drawing/2014/main" id="{4F8717CC-F1D3-AD3A-9CB4-ACCAB845CCB2}"/>
-              </a:ext>
-            </a:extLst>
-          </p:cNvPr>
-          <p:cNvSpPr>
-            <a:spLocks noGrp="1"/>
-          </p:cNvSpPr>
-          <p:nvPr>
-            <p:ph type="title"/>
-          </p:nvPr>
-        </p:nvSpPr>
-        <p:spPr/>
-        <p:txBody>
-          <a:bodyPr/>
-          <a:lstStyle/>
-          <a:p>
-            <a:r>
-              <a:rPr lang="fr-FR" dirty="0"/>
-              <a:t>USB TTL </a:t>
-            </a:r>
-            <a:r>
-              <a:rPr lang="fr-FR" b="0" i="0" dirty="0">
-                <a:solidFill>
-                  <a:srgbClr val="333333"/>
-                </a:solidFill>
-                <a:effectLst/>
-                <a:latin typeface="Roboto" panose="02000000000000000000" pitchFamily="2" charset="0"/>
-              </a:rPr>
-              <a:t>FT232RL</a:t>
-            </a:r>
-            <a:endParaRPr lang="fr-FR" dirty="0"/>
-          </a:p>
-        </p:txBody>
-      </p:sp>
-      <p:sp>
-        <p:nvSpPr>
-          <p:cNvPr id="3" name="Espace réservé du contenu 2">
-            <a:extLst>
-              <a:ext uri="{FF2B5EF4-FFF2-40B4-BE49-F238E27FC236}">
-                <a16:creationId xmlns:a16="http://schemas.microsoft.com/office/drawing/2014/main" id="{68E138E8-BAD3-D9FF-D16C-15AC38D9DC03}"/>
-              </a:ext>
-            </a:extLst>
-          </p:cNvPr>
-          <p:cNvSpPr>
-            <a:spLocks noGrp="1"/>
-          </p:cNvSpPr>
-          <p:nvPr>
-            <p:ph idx="1"/>
-          </p:nvPr>
-        </p:nvSpPr>
-        <p:spPr/>
-        <p:txBody>
-          <a:bodyPr/>
-          <a:lstStyle/>
-          <a:p>
-            <a:r>
-              <a:rPr lang="fr-FR" dirty="0"/>
-              <a:t>RX TX croisé sur TX2 RX2</a:t>
-            </a:r>
-          </a:p>
-          <a:p>
-            <a:r>
-              <a:rPr lang="fr-FR" dirty="0"/>
-              <a:t>Mettre le jumper en 3.3V</a:t>
-            </a:r>
-          </a:p>
-          <a:p>
-            <a:r>
-              <a:rPr lang="fr-FR" dirty="0"/>
-              <a:t>Relier la masse</a:t>
-            </a:r>
-          </a:p>
-          <a:p>
-            <a:r>
-              <a:rPr lang="fr-FR" dirty="0"/>
-              <a:t>Ne pas relier VCC</a:t>
-            </a:r>
-          </a:p>
-        </p:txBody>
-      </p:sp>
-      <p:pic>
-        <p:nvPicPr>
-          <p:cNvPr id="5" name="Image 4">
-            <a:extLst>
-              <a:ext uri="{FF2B5EF4-FFF2-40B4-BE49-F238E27FC236}">
-                <a16:creationId xmlns:a16="http://schemas.microsoft.com/office/drawing/2014/main" id="{8B5CAB29-8520-C922-3501-C10DAD4737FF}"/>
-              </a:ext>
-            </a:extLst>
-          </p:cNvPr>
-          <p:cNvPicPr>
-            <a:picLocks noChangeAspect="1"/>
-          </p:cNvPicPr>
-          <p:nvPr/>
-        </p:nvPicPr>
-        <p:blipFill>
-          <a:blip r:embed="rId2"/>
-          <a:stretch>
-            <a:fillRect/>
-          </a:stretch>
-        </p:blipFill>
-        <p:spPr>
-          <a:xfrm>
-            <a:off x="2843808" y="3574948"/>
-            <a:ext cx="5423000" cy="2860484"/>
-          </a:xfrm>
-          <a:prstGeom prst="rect">
-            <a:avLst/>
-          </a:prstGeom>
-        </p:spPr>
-      </p:pic>
-      <p:pic>
-        <p:nvPicPr>
-          <p:cNvPr id="6" name="Picture 2" descr="Warning, Warning sign Icon, Warning sign, illustration.sign, Red warning">
-            <a:extLst>
-              <a:ext uri="{FF2B5EF4-FFF2-40B4-BE49-F238E27FC236}">
-                <a16:creationId xmlns:a16="http://schemas.microsoft.com/office/drawing/2014/main" id="{F38EAFE1-2B09-D4EC-CD8E-E3CD5214B69E}"/>
-              </a:ext>
-            </a:extLst>
-          </p:cNvPr>
-          <p:cNvPicPr>
-            <a:picLocks noChangeAspect="1" noChangeArrowheads="1"/>
-          </p:cNvPicPr>
-          <p:nvPr/>
-        </p:nvPicPr>
-        <p:blipFill>
-          <a:blip r:embed="rId3" cstate="print">
-            <a:extLst>
-              <a:ext uri="{28A0092B-C50C-407E-A947-70E740481C1C}">
-                <a14:useLocalDpi xmlns:a14="http://schemas.microsoft.com/office/drawing/2010/main" val="0"/>
-              </a:ext>
-            </a:extLst>
-          </a:blip>
-          <a:srcRect/>
-          <a:stretch>
-            <a:fillRect/>
-          </a:stretch>
-        </p:blipFill>
-        <p:spPr bwMode="auto">
-          <a:xfrm>
-            <a:off x="4788024" y="1989467"/>
-            <a:ext cx="936104" cy="1008791"/>
-          </a:xfrm>
-          <a:prstGeom prst="rect">
-            <a:avLst/>
-          </a:prstGeom>
-          <a:noFill/>
-          <a:extLst>
-            <a:ext uri="{909E8E84-426E-40DD-AFC4-6F175D3DCCD1}">
-              <a14:hiddenFill xmlns:a14="http://schemas.microsoft.com/office/drawing/2010/main">
-                <a:solidFill>
-                  <a:srgbClr val="FFFFFF"/>
-                </a:solidFill>
-              </a14:hiddenFill>
-            </a:ext>
-          </a:extLst>
-        </p:spPr>
-      </p:pic>
-    </p:spTree>
-    <p:extLst>
-      <p:ext uri="{BB962C8B-B14F-4D97-AF65-F5344CB8AC3E}">
-        <p14:creationId xmlns:p14="http://schemas.microsoft.com/office/powerpoint/2010/main" val="1861895"/>
-      </p:ext>
-    </p:extLst>
-  </p:cSld>
-  <p:clrMapOvr>
-    <a:masterClrMapping/>
-  </p:clrMapOvr>
-</p:sld>
-</file>
-
-<file path=ppt/slides/slide13.xml><?xml version="1.0" encoding="utf-8"?>
-<p:sld xmlns:a="http://schemas.openxmlformats.org/drawingml/2006/main" xmlns:r="http://schemas.openxmlformats.org/officeDocument/2006/relationships" xmlns:p="http://schemas.openxmlformats.org/presentationml/2006/main">
-  <p:cSld>
-    <p:spTree>
-      <p:nvGrpSpPr>
-        <p:cNvPr id="1" name=""/>
-        <p:cNvGrpSpPr/>
-        <p:nvPr/>
-      </p:nvGrpSpPr>
-      <p:grpSpPr>
-        <a:xfrm>
-          <a:off x="0" y="0"/>
-          <a:ext cx="0" cy="0"/>
-          <a:chOff x="0" y="0"/>
-          <a:chExt cx="0" cy="0"/>
-        </a:xfrm>
-      </p:grpSpPr>
-      <p:sp>
-        <p:nvSpPr>
-          <p:cNvPr id="2" name="Titre 1">
-            <a:extLst>
-              <a:ext uri="{FF2B5EF4-FFF2-40B4-BE49-F238E27FC236}">
                 <a16:creationId xmlns:a16="http://schemas.microsoft.com/office/drawing/2014/main" id="{2F2CFC3F-10E6-353F-913E-F165D183323A}"/>
               </a:ext>
             </a:extLst>
@@ -4344,7 +4159,7 @@
           <a:p>
             <a:r>
               <a:rPr lang="fr-FR" dirty="0"/>
-              <a:t>Serial</a:t>
+              <a:t>Serial to Serial</a:t>
             </a:r>
           </a:p>
         </p:txBody>
@@ -4444,7 +4259,7 @@
 </p:sld>
 </file>
 
-<file path=ppt/slides/slide14.xml><?xml version="1.0" encoding="utf-8"?>
+<file path=ppt/slides/slide13.xml><?xml version="1.0" encoding="utf-8"?>
 <p:sld xmlns:a="http://schemas.openxmlformats.org/drawingml/2006/main" xmlns:r="http://schemas.openxmlformats.org/officeDocument/2006/relationships" xmlns:p="http://schemas.openxmlformats.org/presentationml/2006/main">
   <p:cSld>
     <p:spTree>
@@ -4484,7 +4299,7 @@
           <a:p>
             <a:r>
               <a:rPr lang="fr-FR" dirty="0"/>
-              <a:t>Serial</a:t>
+              <a:t>Serial to Serial</a:t>
             </a:r>
           </a:p>
         </p:txBody>
@@ -4516,49 +4331,32 @@
       </p:sp>
       <p:pic>
         <p:nvPicPr>
-          <p:cNvPr id="1026" name="Picture 2" descr="An Arduino-RPi 2 Interface using Serial Communication – rhydoLABZ-wiki">
+          <p:cNvPr id="5" name="Image 4">
             <a:extLst>
               <a:ext uri="{FF2B5EF4-FFF2-40B4-BE49-F238E27FC236}">
-                <a16:creationId xmlns:a16="http://schemas.microsoft.com/office/drawing/2014/main" id="{58BFEC50-C111-796A-0F75-78146B65A80D}"/>
+                <a16:creationId xmlns:a16="http://schemas.microsoft.com/office/drawing/2014/main" id="{73292D88-F487-0DA5-BC62-FE00692158C9}"/>
               </a:ext>
             </a:extLst>
           </p:cNvPr>
           <p:cNvPicPr>
-            <a:picLocks noChangeAspect="1" noChangeArrowheads="1"/>
+            <a:picLocks noChangeAspect="1"/>
           </p:cNvPicPr>
           <p:nvPr/>
         </p:nvPicPr>
         <p:blipFill>
-          <a:blip r:embed="rId2">
-            <a:extLst>
-              <a:ext uri="{28A0092B-C50C-407E-A947-70E740481C1C}">
-                <a14:useLocalDpi xmlns:a14="http://schemas.microsoft.com/office/drawing/2010/main" val="0"/>
-              </a:ext>
-            </a:extLst>
-          </a:blip>
-          <a:srcRect/>
+          <a:blip r:embed="rId2"/>
           <a:stretch>
             <a:fillRect/>
           </a:stretch>
         </p:blipFill>
-        <p:spPr bwMode="auto">
+        <p:spPr>
           <a:xfrm>
-            <a:off x="1223199" y="1268760"/>
-            <a:ext cx="6458297" cy="5384471"/>
+            <a:off x="690722" y="1246412"/>
+            <a:ext cx="7743629" cy="5206924"/>
           </a:xfrm>
           <a:prstGeom prst="rect">
             <a:avLst/>
           </a:prstGeom>
-          <a:noFill/>
-          <a:extLst>
-            <a:ext uri="{909E8E84-426E-40DD-AFC4-6F175D3DCCD1}">
-              <a14:hiddenFill xmlns:a14="http://schemas.microsoft.com/office/drawing/2010/main">
-                <a:solidFill>
-                  <a:srgbClr val="FFFFFF"/>
-                </a:solidFill>
-              </a14:hiddenFill>
-            </a:ext>
-          </a:extLst>
         </p:spPr>
       </p:pic>
     </p:spTree>
@@ -4574,7 +4372,7 @@
 </p:sld>
 </file>
 
-<file path=ppt/slides/slide15.xml><?xml version="1.0" encoding="utf-8"?>
+<file path=ppt/slides/slide14.xml><?xml version="1.0" encoding="utf-8"?>
 <p:sld xmlns:a="http://schemas.openxmlformats.org/drawingml/2006/main" xmlns:r="http://schemas.openxmlformats.org/officeDocument/2006/relationships" xmlns:p="http://schemas.openxmlformats.org/presentationml/2006/main">
   <p:cSld>
     <p:spTree>
@@ -4701,7 +4499,7 @@
 </p:sld>
 </file>
 
-<file path=ppt/slides/slide16.xml><?xml version="1.0" encoding="utf-8"?>
+<file path=ppt/slides/slide15.xml><?xml version="1.0" encoding="utf-8"?>
 <p:sld xmlns:a="http://schemas.openxmlformats.org/drawingml/2006/main" xmlns:r="http://schemas.openxmlformats.org/officeDocument/2006/relationships" xmlns:p="http://schemas.openxmlformats.org/presentationml/2006/main">
   <p:cSld>
     <p:spTree>
@@ -4872,7 +4670,7 @@
 </p:sld>
 </file>
 
-<file path=ppt/slides/slide17.xml><?xml version="1.0" encoding="utf-8"?>
+<file path=ppt/slides/slide16.xml><?xml version="1.0" encoding="utf-8"?>
 <p:sld xmlns:a="http://schemas.openxmlformats.org/drawingml/2006/main" xmlns:r="http://schemas.openxmlformats.org/officeDocument/2006/relationships" xmlns:p="http://schemas.openxmlformats.org/presentationml/2006/main">
   <p:cSld>
     <p:spTree>
@@ -4992,7 +4790,7 @@
 </p:sld>
 </file>
 
-<file path=ppt/slides/slide18.xml><?xml version="1.0" encoding="utf-8"?>
+<file path=ppt/slides/slide17.xml><?xml version="1.0" encoding="utf-8"?>
 <p:sld xmlns:a="http://schemas.openxmlformats.org/drawingml/2006/main" xmlns:r="http://schemas.openxmlformats.org/officeDocument/2006/relationships" xmlns:p="http://schemas.openxmlformats.org/presentationml/2006/main">
   <p:cSld>
     <p:spTree>
@@ -5120,6 +4918,233 @@
     <p:extLst>
       <p:ext uri="{BB962C8B-B14F-4D97-AF65-F5344CB8AC3E}">
         <p14:creationId xmlns:p14="http://schemas.microsoft.com/office/powerpoint/2010/main" val="3753647615"/>
+      </p:ext>
+    </p:extLst>
+  </p:cSld>
+  <p:clrMapOvr>
+    <a:masterClrMapping/>
+  </p:clrMapOvr>
+</p:sld>
+</file>
+
+<file path=ppt/slides/slide18.xml><?xml version="1.0" encoding="utf-8"?>
+<p:sld xmlns:a="http://schemas.openxmlformats.org/drawingml/2006/main" xmlns:r="http://schemas.openxmlformats.org/officeDocument/2006/relationships" xmlns:p="http://schemas.openxmlformats.org/presentationml/2006/main">
+  <p:cSld>
+    <p:spTree>
+      <p:nvGrpSpPr>
+        <p:cNvPr id="1" name=""/>
+        <p:cNvGrpSpPr/>
+        <p:nvPr/>
+      </p:nvGrpSpPr>
+      <p:grpSpPr>
+        <a:xfrm>
+          <a:off x="0" y="0"/>
+          <a:ext cx="0" cy="0"/>
+          <a:chOff x="0" y="0"/>
+          <a:chExt cx="0" cy="0"/>
+        </a:xfrm>
+      </p:grpSpPr>
+      <p:sp>
+        <p:nvSpPr>
+          <p:cNvPr id="2" name="Titre 1"/>
+          <p:cNvSpPr>
+            <a:spLocks noGrp="1"/>
+          </p:cNvSpPr>
+          <p:nvPr>
+            <p:ph type="title"/>
+          </p:nvPr>
+        </p:nvSpPr>
+        <p:spPr/>
+        <p:txBody>
+          <a:bodyPr/>
+          <a:lstStyle/>
+          <a:p>
+            <a:r>
+              <a:rPr lang="fr-FR" dirty="0"/>
+              <a:t>Exemple Python - USB</a:t>
+            </a:r>
+          </a:p>
+        </p:txBody>
+      </p:sp>
+      <p:sp>
+        <p:nvSpPr>
+          <p:cNvPr id="3" name="Espace réservé du contenu 2"/>
+          <p:cNvSpPr>
+            <a:spLocks noGrp="1"/>
+          </p:cNvSpPr>
+          <p:nvPr>
+            <p:ph idx="1"/>
+          </p:nvPr>
+        </p:nvSpPr>
+        <p:spPr/>
+        <p:txBody>
+          <a:bodyPr/>
+          <a:lstStyle/>
+          <a:p>
+            <a:r>
+              <a:rPr lang="fr-FR" sz="2400" dirty="0"/>
+              <a:t>import serial</a:t>
+            </a:r>
+          </a:p>
+          <a:p>
+            <a:r>
+              <a:rPr lang="fr-FR" sz="2400" dirty="0" err="1"/>
+              <a:t>sock</a:t>
+            </a:r>
+            <a:r>
+              <a:rPr lang="fr-FR" sz="2400" dirty="0"/>
+              <a:t> = </a:t>
+            </a:r>
+            <a:r>
+              <a:rPr lang="fr-FR" sz="2400" dirty="0" err="1"/>
+              <a:t>serial.Serial</a:t>
+            </a:r>
+            <a:r>
+              <a:rPr lang="fr-FR" sz="2400" dirty="0"/>
+              <a:t>("/</a:t>
+            </a:r>
+            <a:r>
+              <a:rPr lang="fr-FR" sz="2400" dirty="0" err="1"/>
+              <a:t>dev</a:t>
+            </a:r>
+            <a:r>
+              <a:rPr lang="fr-FR" sz="2400" dirty="0"/>
+              <a:t>/ttyUSB0")</a:t>
+            </a:r>
+          </a:p>
+          <a:p>
+            <a:pPr lvl="1"/>
+            <a:r>
+              <a:rPr lang="fr-FR" sz="2000" dirty="0"/>
+              <a:t>Ouvre la connexion série</a:t>
+            </a:r>
+          </a:p>
+          <a:p>
+            <a:r>
+              <a:rPr lang="fr-FR" sz="2400" dirty="0"/>
+              <a:t>s = </a:t>
+            </a:r>
+            <a:r>
+              <a:rPr lang="fr-FR" sz="2400" dirty="0" err="1"/>
+              <a:t>sock.read</a:t>
+            </a:r>
+            <a:r>
+              <a:rPr lang="fr-FR" sz="2400" dirty="0"/>
+              <a:t>()</a:t>
+            </a:r>
+          </a:p>
+          <a:p>
+            <a:pPr lvl="1"/>
+            <a:r>
+              <a:rPr lang="fr-FR" sz="2000" dirty="0"/>
+              <a:t>Lit un caractère</a:t>
+            </a:r>
+          </a:p>
+          <a:p>
+            <a:r>
+              <a:rPr lang="fr-FR" sz="2400" dirty="0"/>
+              <a:t>s = </a:t>
+            </a:r>
+            <a:r>
+              <a:rPr lang="fr-FR" sz="2400" dirty="0" err="1"/>
+              <a:t>sock.readline</a:t>
+            </a:r>
+            <a:r>
+              <a:rPr lang="fr-FR" sz="2400" dirty="0"/>
+              <a:t>()</a:t>
+            </a:r>
+          </a:p>
+          <a:p>
+            <a:pPr lvl="1"/>
+            <a:r>
+              <a:rPr lang="fr-FR" sz="2000" dirty="0"/>
+              <a:t>Lit une ligne</a:t>
+            </a:r>
+          </a:p>
+          <a:p>
+            <a:r>
+              <a:rPr lang="fr-FR" sz="2400" dirty="0" err="1"/>
+              <a:t>print</a:t>
+            </a:r>
+            <a:r>
+              <a:rPr lang="fr-FR" sz="2400" dirty="0"/>
+              <a:t>(</a:t>
+            </a:r>
+            <a:r>
+              <a:rPr lang="fr-FR" sz="2400" dirty="0" err="1"/>
+              <a:t>s.decode</a:t>
+            </a:r>
+            <a:r>
+              <a:rPr lang="fr-FR" sz="2400" dirty="0"/>
+              <a:t>())</a:t>
+            </a:r>
+          </a:p>
+          <a:p>
+            <a:pPr lvl="1"/>
+            <a:r>
+              <a:rPr lang="fr-FR" sz="2000" dirty="0"/>
+              <a:t>Transforme les octets en caractères</a:t>
+            </a:r>
+          </a:p>
+          <a:p>
+            <a:r>
+              <a:rPr lang="fr-FR" sz="2400" dirty="0" err="1"/>
+              <a:t>sock.write</a:t>
+            </a:r>
+            <a:r>
+              <a:rPr lang="fr-FR" sz="2400" dirty="0"/>
+              <a:t>("Hello\</a:t>
+            </a:r>
+            <a:r>
+              <a:rPr lang="fr-FR" sz="2400" dirty="0" err="1"/>
+              <a:t>n".encode</a:t>
+            </a:r>
+            <a:r>
+              <a:rPr lang="fr-FR" sz="2400" dirty="0"/>
+              <a:t>())</a:t>
+            </a:r>
+          </a:p>
+          <a:p>
+            <a:pPr lvl="1"/>
+            <a:r>
+              <a:rPr lang="fr-FR" sz="2000" dirty="0"/>
+              <a:t>Ecrit une </a:t>
+            </a:r>
+            <a:r>
+              <a:rPr lang="fr-FR" sz="2000"/>
+              <a:t>chaine transformée </a:t>
+            </a:r>
+            <a:r>
+              <a:rPr lang="fr-FR" sz="2000" dirty="0"/>
+              <a:t>en octets</a:t>
+            </a:r>
+          </a:p>
+          <a:p>
+            <a:r>
+              <a:rPr lang="fr-FR" sz="2400" dirty="0" err="1"/>
+              <a:t>sock.close</a:t>
+            </a:r>
+            <a:r>
+              <a:rPr lang="fr-FR" sz="2400" dirty="0"/>
+              <a:t>()</a:t>
+            </a:r>
+          </a:p>
+          <a:p>
+            <a:pPr lvl="1"/>
+            <a:r>
+              <a:rPr lang="fr-FR" sz="2000" dirty="0"/>
+              <a:t>Ferme la liaison</a:t>
+            </a:r>
+          </a:p>
+          <a:p>
+            <a:endParaRPr lang="fr-FR" sz="2400" dirty="0"/>
+          </a:p>
+        </p:txBody>
+      </p:sp>
+    </p:spTree>
+    <p:extLst>
+      <p:ext uri="{BB962C8B-B14F-4D97-AF65-F5344CB8AC3E}">
+        <p14:creationId xmlns:p14="http://schemas.microsoft.com/office/powerpoint/2010/main" val="2563558938"/>
       </p:ext>
     </p:extLst>
   </p:cSld>
@@ -5162,8 +5187,12 @@
           <a:lstStyle/>
           <a:p>
             <a:r>
-              <a:rPr lang="fr-FR" dirty="0"/>
-              <a:t>Exemple Python - USB</a:t>
+              <a:rPr lang="fr-FR" dirty="0" err="1"/>
+              <a:t>Raspberry</a:t>
+            </a:r>
+            <a:r>
+              <a:rPr lang="fr-FR" dirty="0"/>
+              <a:t> RS232</a:t>
             </a:r>
           </a:p>
         </p:txBody>
@@ -5184,169 +5213,74 @@
           <a:lstStyle/>
           <a:p>
             <a:r>
-              <a:rPr lang="fr-FR" sz="2400" dirty="0"/>
-              <a:t>import serial</a:t>
-            </a:r>
-          </a:p>
-          <a:p>
-            <a:r>
-              <a:rPr lang="fr-FR" sz="2400" dirty="0" err="1"/>
-              <a:t>sock</a:t>
-            </a:r>
-            <a:r>
-              <a:rPr lang="fr-FR" sz="2400" dirty="0"/>
-              <a:t> = </a:t>
-            </a:r>
-            <a:r>
-              <a:rPr lang="fr-FR" sz="2400" dirty="0" err="1"/>
-              <a:t>serial.Serial</a:t>
-            </a:r>
-            <a:r>
-              <a:rPr lang="fr-FR" sz="2400" dirty="0"/>
-              <a:t>("/</a:t>
-            </a:r>
-            <a:r>
-              <a:rPr lang="fr-FR" sz="2400" dirty="0" err="1"/>
-              <a:t>dev</a:t>
-            </a:r>
-            <a:r>
-              <a:rPr lang="fr-FR" sz="2400" dirty="0"/>
-              <a:t>/ttyUSB0")</a:t>
-            </a:r>
-          </a:p>
-          <a:p>
-            <a:pPr lvl="1"/>
-            <a:r>
-              <a:rPr lang="fr-FR" sz="2000" dirty="0"/>
-              <a:t>Ouvre la connexion série</a:t>
-            </a:r>
-          </a:p>
-          <a:p>
-            <a:r>
-              <a:rPr lang="fr-FR" sz="2400" dirty="0"/>
-              <a:t>s = </a:t>
-            </a:r>
-            <a:r>
-              <a:rPr lang="fr-FR" sz="2400" dirty="0" err="1"/>
-              <a:t>sock.read</a:t>
-            </a:r>
-            <a:r>
-              <a:rPr lang="fr-FR" sz="2400" dirty="0"/>
-              <a:t>()</a:t>
-            </a:r>
-          </a:p>
-          <a:p>
-            <a:pPr lvl="1"/>
-            <a:r>
-              <a:rPr lang="fr-FR" sz="2000" dirty="0"/>
-              <a:t>Lit un caractère</a:t>
-            </a:r>
-          </a:p>
-          <a:p>
-            <a:r>
-              <a:rPr lang="fr-FR" sz="2400" dirty="0"/>
-              <a:t>s = </a:t>
-            </a:r>
-            <a:r>
-              <a:rPr lang="fr-FR" sz="2400" dirty="0" err="1"/>
-              <a:t>sock.readline</a:t>
-            </a:r>
-            <a:r>
-              <a:rPr lang="fr-FR" sz="2400" dirty="0"/>
-              <a:t>()</a:t>
-            </a:r>
-          </a:p>
-          <a:p>
-            <a:pPr lvl="1"/>
-            <a:r>
-              <a:rPr lang="fr-FR" sz="2000" dirty="0"/>
-              <a:t>Lit une ligne</a:t>
-            </a:r>
-          </a:p>
-          <a:p>
-            <a:r>
-              <a:rPr lang="fr-FR" sz="2400" dirty="0" err="1"/>
-              <a:t>print</a:t>
-            </a:r>
-            <a:r>
-              <a:rPr lang="fr-FR" sz="2400" dirty="0"/>
-              <a:t>(</a:t>
-            </a:r>
-            <a:r>
-              <a:rPr lang="fr-FR" sz="2400" dirty="0" err="1"/>
-              <a:t>s.decode</a:t>
-            </a:r>
-            <a:r>
-              <a:rPr lang="fr-FR" sz="2400" dirty="0"/>
-              <a:t>())</a:t>
-            </a:r>
-          </a:p>
-          <a:p>
-            <a:pPr lvl="1"/>
-            <a:r>
-              <a:rPr lang="fr-FR" sz="2000" dirty="0"/>
-              <a:t>Transforme les octets en caractères</a:t>
-            </a:r>
-          </a:p>
-          <a:p>
-            <a:r>
-              <a:rPr lang="fr-FR" sz="2400" dirty="0" err="1"/>
-              <a:t>sock.write</a:t>
-            </a:r>
-            <a:r>
-              <a:rPr lang="fr-FR" sz="2400" dirty="0"/>
-              <a:t>("Hello\</a:t>
-            </a:r>
-            <a:r>
-              <a:rPr lang="fr-FR" sz="2400" dirty="0" err="1"/>
-              <a:t>n".encode</a:t>
-            </a:r>
-            <a:r>
-              <a:rPr lang="fr-FR" sz="2400" dirty="0"/>
-              <a:t>())</a:t>
-            </a:r>
-          </a:p>
-          <a:p>
-            <a:pPr lvl="1"/>
-            <a:r>
-              <a:rPr lang="fr-FR" sz="2000" dirty="0"/>
-              <a:t>Ecrit une </a:t>
-            </a:r>
-            <a:r>
-              <a:rPr lang="fr-FR" sz="2000"/>
-              <a:t>chaine transformée </a:t>
-            </a:r>
-            <a:r>
-              <a:rPr lang="fr-FR" sz="2000" dirty="0"/>
-              <a:t>en octets</a:t>
-            </a:r>
-          </a:p>
-          <a:p>
-            <a:r>
-              <a:rPr lang="fr-FR" sz="2400" dirty="0" err="1"/>
-              <a:t>sock.close</a:t>
-            </a:r>
-            <a:r>
-              <a:rPr lang="fr-FR" sz="2400" dirty="0"/>
-              <a:t>()</a:t>
-            </a:r>
-          </a:p>
-          <a:p>
-            <a:pPr lvl="1"/>
-            <a:r>
-              <a:rPr lang="fr-FR" sz="2000" dirty="0"/>
-              <a:t>Ferme la liaison</a:t>
-            </a:r>
-          </a:p>
-          <a:p>
-            <a:endParaRPr lang="fr-FR" sz="2400" dirty="0"/>
+              <a:rPr lang="fr-FR" dirty="0"/>
+              <a:t>L'adjonction d'un câble USB - RS232 permet de dialoguer en RS232</a:t>
+            </a:r>
+          </a:p>
+          <a:p>
+            <a:r>
+              <a:rPr lang="fr-FR" dirty="0"/>
+              <a:t>Il est possible de fixer les noms des </a:t>
+            </a:r>
+            <a:r>
+              <a:rPr lang="fr-FR" dirty="0" err="1"/>
+              <a:t>devices</a:t>
+            </a:r>
+            <a:r>
+              <a:rPr lang="fr-FR" dirty="0"/>
+              <a:t> USB dans ce fichier</a:t>
+            </a:r>
           </a:p>
         </p:txBody>
       </p:sp>
+      <p:pic>
+        <p:nvPicPr>
+          <p:cNvPr id="4" name="Image 3"/>
+          <p:cNvPicPr/>
+          <p:nvPr/>
+        </p:nvPicPr>
+        <p:blipFill>
+          <a:blip r:embed="rId2"/>
+          <a:stretch>
+            <a:fillRect/>
+          </a:stretch>
+        </p:blipFill>
+        <p:spPr>
+          <a:xfrm>
+            <a:off x="5566362" y="3068960"/>
+            <a:ext cx="3096344" cy="2563825"/>
+          </a:xfrm>
+          <a:prstGeom prst="rect">
+            <a:avLst/>
+          </a:prstGeom>
+        </p:spPr>
+      </p:pic>
+      <p:pic>
+        <p:nvPicPr>
+          <p:cNvPr id="5" name="Image 4"/>
+          <p:cNvPicPr/>
+          <p:nvPr/>
+        </p:nvPicPr>
+        <p:blipFill>
+          <a:blip r:embed="rId3"/>
+          <a:stretch>
+            <a:fillRect/>
+          </a:stretch>
+        </p:blipFill>
+        <p:spPr>
+          <a:xfrm>
+            <a:off x="0" y="3362160"/>
+            <a:ext cx="5283506" cy="3520676"/>
+          </a:xfrm>
+          <a:prstGeom prst="rect">
+            <a:avLst/>
+          </a:prstGeom>
+        </p:spPr>
+      </p:pic>
     </p:spTree>
     <p:extLst>
       <p:ext uri="{BB962C8B-B14F-4D97-AF65-F5344CB8AC3E}">
-        <p14:creationId xmlns:p14="http://schemas.microsoft.com/office/powerpoint/2010/main" val="2563558938"/>
+        <p14:creationId xmlns:p14="http://schemas.microsoft.com/office/powerpoint/2010/main" val="1236451097"/>
       </p:ext>
     </p:extLst>
   </p:cSld>
@@ -5576,7 +5510,13 @@
       </p:grpSpPr>
       <p:sp>
         <p:nvSpPr>
-          <p:cNvPr id="2" name="Titre 1"/>
+          <p:cNvPr id="2" name="Titre 1">
+            <a:extLst>
+              <a:ext uri="{FF2B5EF4-FFF2-40B4-BE49-F238E27FC236}">
+                <a16:creationId xmlns:a16="http://schemas.microsoft.com/office/drawing/2014/main" id="{4F8717CC-F1D3-AD3A-9CB4-ACCAB845CCB2}"/>
+              </a:ext>
+            </a:extLst>
+          </p:cNvPr>
           <p:cNvSpPr>
             <a:spLocks noGrp="1"/>
           </p:cNvSpPr>
@@ -5590,19 +5530,32 @@
           <a:lstStyle/>
           <a:p>
             <a:r>
-              <a:rPr lang="fr-FR" dirty="0" err="1"/>
-              <a:t>Raspberry</a:t>
-            </a:r>
-            <a:r>
-              <a:rPr lang="fr-FR" dirty="0"/>
-              <a:t> RS232</a:t>
-            </a:r>
+              <a:rPr lang="fr-FR" dirty="0"/>
+              <a:t>USB TTL </a:t>
+            </a:r>
+            <a:r>
+              <a:rPr lang="fr-FR" b="0" i="0" dirty="0">
+                <a:solidFill>
+                  <a:srgbClr val="333333"/>
+                </a:solidFill>
+                <a:effectLst/>
+                <a:latin typeface="Roboto" panose="02000000000000000000" pitchFamily="2" charset="0"/>
+              </a:rPr>
+              <a:t>FT232RL</a:t>
+            </a:r>
+            <a:endParaRPr lang="fr-FR" dirty="0"/>
           </a:p>
         </p:txBody>
       </p:sp>
       <p:sp>
         <p:nvSpPr>
-          <p:cNvPr id="3" name="Espace réservé du contenu 2"/>
+          <p:cNvPr id="3" name="Espace réservé du contenu 2">
+            <a:extLst>
+              <a:ext uri="{FF2B5EF4-FFF2-40B4-BE49-F238E27FC236}">
+                <a16:creationId xmlns:a16="http://schemas.microsoft.com/office/drawing/2014/main" id="{68E138E8-BAD3-D9FF-D16C-15AC38D9DC03}"/>
+              </a:ext>
+            </a:extLst>
+          </p:cNvPr>
           <p:cNvSpPr>
             <a:spLocks noGrp="1"/>
           </p:cNvSpPr>
@@ -5617,29 +5570,51 @@
           <a:p>
             <a:r>
               <a:rPr lang="fr-FR" dirty="0"/>
-              <a:t>L'adjonction d'un câble USB - RS232 permet de dialoguer en RS232</a:t>
-            </a:r>
-          </a:p>
-          <a:p>
-            <a:r>
-              <a:rPr lang="fr-FR" dirty="0"/>
-              <a:t>Il est possible de fixer les noms des </a:t>
-            </a:r>
-            <a:r>
-              <a:rPr lang="fr-FR" dirty="0" err="1"/>
-              <a:t>devices</a:t>
-            </a:r>
-            <a:r>
-              <a:rPr lang="fr-FR" dirty="0"/>
-              <a:t> USB dans ce fichier</a:t>
+              <a:t>Transforme un signal UART en USB</a:t>
+            </a:r>
+          </a:p>
+          <a:p>
+            <a:pPr lvl="1"/>
+            <a:r>
+              <a:rPr lang="fr-FR" dirty="0"/>
+              <a:t>RX TX croisé sur TX2 RX2</a:t>
+            </a:r>
+          </a:p>
+          <a:p>
+            <a:pPr lvl="1"/>
+            <a:r>
+              <a:rPr lang="fr-FR" dirty="0"/>
+              <a:t>Mettre le jumper en 3.3V</a:t>
+            </a:r>
+          </a:p>
+          <a:p>
+            <a:pPr lvl="1"/>
+            <a:r>
+              <a:rPr lang="fr-FR" dirty="0"/>
+              <a:t>Relier la masse</a:t>
+            </a:r>
+          </a:p>
+          <a:p>
+            <a:pPr lvl="1"/>
+            <a:r>
+              <a:rPr lang="fr-FR" dirty="0"/>
+              <a:t>Ne pas relier VCC</a:t>
             </a:r>
           </a:p>
         </p:txBody>
       </p:sp>
       <p:pic>
         <p:nvPicPr>
-          <p:cNvPr id="4" name="Image 3"/>
-          <p:cNvPicPr/>
+          <p:cNvPr id="5" name="Image 4">
+            <a:extLst>
+              <a:ext uri="{FF2B5EF4-FFF2-40B4-BE49-F238E27FC236}">
+                <a16:creationId xmlns:a16="http://schemas.microsoft.com/office/drawing/2014/main" id="{8B5CAB29-8520-C922-3501-C10DAD4737FF}"/>
+              </a:ext>
+            </a:extLst>
+          </p:cNvPr>
+          <p:cNvPicPr>
+            <a:picLocks noChangeAspect="1"/>
+          </p:cNvPicPr>
           <p:nvPr/>
         </p:nvPicPr>
         <p:blipFill>
@@ -5650,8 +5625,8 @@
         </p:blipFill>
         <p:spPr>
           <a:xfrm>
-            <a:off x="5566362" y="3068960"/>
-            <a:ext cx="3096344" cy="2563825"/>
+            <a:off x="2076524" y="3966414"/>
+            <a:ext cx="5423000" cy="2860484"/>
           </a:xfrm>
           <a:prstGeom prst="rect">
             <a:avLst/>
@@ -5660,30 +5635,102 @@
       </p:pic>
       <p:pic>
         <p:nvPicPr>
-          <p:cNvPr id="5" name="Image 4"/>
-          <p:cNvPicPr/>
+          <p:cNvPr id="6" name="Picture 2" descr="Warning, Warning sign Icon, Warning sign, illustration.sign, Red warning">
+            <a:extLst>
+              <a:ext uri="{FF2B5EF4-FFF2-40B4-BE49-F238E27FC236}">
+                <a16:creationId xmlns:a16="http://schemas.microsoft.com/office/drawing/2014/main" id="{F38EAFE1-2B09-D4EC-CD8E-E3CD5214B69E}"/>
+              </a:ext>
+            </a:extLst>
+          </p:cNvPr>
+          <p:cNvPicPr>
+            <a:picLocks noChangeAspect="1" noChangeArrowheads="1"/>
+          </p:cNvPicPr>
           <p:nvPr/>
         </p:nvPicPr>
         <p:blipFill>
-          <a:blip r:embed="rId3"/>
+          <a:blip r:embed="rId3" cstate="print">
+            <a:extLst>
+              <a:ext uri="{28A0092B-C50C-407E-A947-70E740481C1C}">
+                <a14:useLocalDpi xmlns:a14="http://schemas.microsoft.com/office/drawing/2010/main" val="0"/>
+              </a:ext>
+            </a:extLst>
+          </a:blip>
+          <a:srcRect/>
           <a:stretch>
             <a:fillRect/>
           </a:stretch>
         </p:blipFill>
-        <p:spPr>
+        <p:spPr bwMode="auto">
           <a:xfrm>
-            <a:off x="0" y="3362160"/>
-            <a:ext cx="5283506" cy="3520676"/>
+            <a:off x="4788024" y="1989467"/>
+            <a:ext cx="936104" cy="1008791"/>
           </a:xfrm>
           <a:prstGeom prst="rect">
             <a:avLst/>
           </a:prstGeom>
+          <a:noFill/>
+          <a:extLst>
+            <a:ext uri="{909E8E84-426E-40DD-AFC4-6F175D3DCCD1}">
+              <a14:hiddenFill xmlns:a14="http://schemas.microsoft.com/office/drawing/2010/main">
+                <a:solidFill>
+                  <a:srgbClr val="FFFFFF"/>
+                </a:solidFill>
+              </a14:hiddenFill>
+            </a:ext>
+          </a:extLst>
+        </p:spPr>
+      </p:pic>
+      <p:pic>
+        <p:nvPicPr>
+          <p:cNvPr id="4" name="Picture 2" descr="Warning, Warning sign Icon, Warning sign, illustration.sign, Red warning">
+            <a:extLst>
+              <a:ext uri="{FF2B5EF4-FFF2-40B4-BE49-F238E27FC236}">
+                <a16:creationId xmlns:a16="http://schemas.microsoft.com/office/drawing/2014/main" id="{72DCBC79-597B-1A12-7FBB-B0388E993D1D}"/>
+              </a:ext>
+            </a:extLst>
+          </p:cNvPr>
+          <p:cNvPicPr>
+            <a:picLocks noChangeAspect="1" noChangeArrowheads="1"/>
+          </p:cNvPicPr>
+          <p:nvPr/>
+        </p:nvPicPr>
+        <p:blipFill>
+          <a:blip r:embed="rId3" cstate="print">
+            <a:extLst>
+              <a:ext uri="{28A0092B-C50C-407E-A947-70E740481C1C}">
+                <a14:useLocalDpi xmlns:a14="http://schemas.microsoft.com/office/drawing/2010/main" val="0"/>
+              </a:ext>
+            </a:extLst>
+          </a:blip>
+          <a:srcRect/>
+          <a:stretch>
+            <a:fillRect/>
+          </a:stretch>
+        </p:blipFill>
+        <p:spPr bwMode="auto">
+          <a:xfrm>
+            <a:off x="3806653" y="2891586"/>
+            <a:ext cx="936104" cy="1008791"/>
+          </a:xfrm>
+          <a:prstGeom prst="rect">
+            <a:avLst/>
+          </a:prstGeom>
+          <a:noFill/>
+          <a:extLst>
+            <a:ext uri="{909E8E84-426E-40DD-AFC4-6F175D3DCCD1}">
+              <a14:hiddenFill xmlns:a14="http://schemas.microsoft.com/office/drawing/2010/main">
+                <a:solidFill>
+                  <a:srgbClr val="FFFFFF"/>
+                </a:solidFill>
+              </a14:hiddenFill>
+            </a:ext>
+          </a:extLst>
         </p:spPr>
       </p:pic>
     </p:spTree>
     <p:extLst>
       <p:ext uri="{BB962C8B-B14F-4D97-AF65-F5344CB8AC3E}">
-        <p14:creationId xmlns:p14="http://schemas.microsoft.com/office/powerpoint/2010/main" val="1236451097"/>
+        <p14:creationId xmlns:p14="http://schemas.microsoft.com/office/powerpoint/2010/main" val="2837651125"/>
       </p:ext>
     </p:extLst>
   </p:cSld>
@@ -6262,11 +6309,7 @@
             </a:r>
           </a:p>
           <a:p>
-            <a:pPr lvl="1"/>
-            <a:r>
-              <a:rPr lang="fr-FR" dirty="0"/>
-              <a:t>Le flash</a:t>
-            </a:r>
+            <a:endParaRPr lang="fr-FR" dirty="0"/>
           </a:p>
           <a:p>
             <a:r>
@@ -6289,6 +6332,9 @@
             <a:endParaRPr lang="fr-FR" dirty="0"/>
           </a:p>
           <a:p>
+            <a:pPr marL="0" indent="0">
+              <a:buNone/>
+            </a:pPr>
             <a:endParaRPr lang="fr-FR" dirty="0"/>
           </a:p>
           <a:p>

--- a/ppt/IoT21-MicropythonSerial.pptx
+++ b/ppt/IoT21-MicropythonSerial.pptx
@@ -3933,7 +3933,7 @@
           <a:p>
             <a:r>
               <a:rPr lang="fr-FR" dirty="0" err="1"/>
-              <a:t>uart.all</a:t>
+              <a:t>uart.any</a:t>
             </a:r>
             <a:r>
               <a:rPr lang="fr-FR" dirty="0"/>
@@ -6523,7 +6523,15 @@
             </a:r>
             <a:r>
               <a:rPr lang="en-US" dirty="0"/>
-              <a:t>(sys.stdin,1)</a:t>
+              <a:t>(</a:t>
+            </a:r>
+            <a:r>
+              <a:rPr lang="en-US" dirty="0" err="1"/>
+              <a:t>sys.stdin</a:t>
+            </a:r>
+            <a:r>
+              <a:rPr lang="en-US" dirty="0"/>
+              <a:t>)</a:t>
             </a:r>
           </a:p>
           <a:p>
